--- a/docs/quickguides/en/cars/pptx/22_Quick_Guide_oneSCM_Ausblick_und_Weiterentwicklung_EN_Cars.pptx
+++ b/docs/quickguides/en/cars/pptx/22_Quick_Guide_oneSCM_Ausblick_und_Weiterentwicklung_EN_Cars.pptx
@@ -1459,7 +1459,7 @@
                 <a:ea typeface="MB Corpo S Text Office" pitchFamily="34" charset="-122"/>
                 <a:cs typeface="MB Corpo S Text Office" pitchFamily="34" charset="-120"/>
               </a:rPr>
-              <a:t>This document is interactive – references to handbook chapters and systems are provided as links.</a:t>
+              <a:t>References to handbook chapters and systems are highlighted; e-mail addresses are provided as links.</a:t>
             </a:r>
             <a:endParaRPr lang="en-US" sz="900" dirty="0"/>
           </a:p>
@@ -2859,11 +2859,11 @@
         <p:spPr>
           <a:xfrm>
             <a:off x="201168" y="4242816"/>
-            <a:ext cx="4663440" cy="1014984"/>
+            <a:ext cx="4663440" cy="1316736"/>
           </a:xfrm>
           <a:prstGeom prst="roundRect">
             <a:avLst>
-              <a:gd name="adj" fmla="val 9009"/>
+              <a:gd name="adj" fmla="val 6944"/>
             </a:avLst>
           </a:prstGeom>
           <a:solidFill>
@@ -2927,7 +2927,7 @@
         <p:spPr>
           <a:xfrm>
             <a:off x="310896" y="4590288"/>
-            <a:ext cx="4480560" cy="612648"/>
+            <a:ext cx="4480560" cy="914400"/>
           </a:xfrm>
           <a:prstGeom prst="rect">
             <a:avLst/>
@@ -2976,7 +2976,7 @@
                 <a:ea typeface="MB Corpo S Text Office" pitchFamily="34" charset="-122"/>
                 <a:cs typeface="MB Corpo S Text Office" pitchFamily="34" charset="-120"/>
               </a:rPr>
-              <a:t>Release-related known errors are listed in Chapter 23.2.</a:t>
+              <a:t>The system does not convert kilometers to miles, performs no ISP code check and adds the chassis number for deal or order IDs only via the system handover (22.2).</a:t>
             </a:r>
             <a:endParaRPr lang="en-US" sz="900" dirty="0"/>
           </a:p>
